--- a/Early_Detection_Lung_Cancer_CapsNet_modified.pptx
+++ b/Early_Detection_Lung_Cancer_CapsNet_modified.pptx
@@ -221,7 +221,7 @@
           <a:p>
             <a:fld id="{95027B0B-E4EC-4817-B8AE-E1F5A0E43040}" type="datetimeFigureOut">
               <a:rPr lang="en-US" smtClean="0"/>
-              <a:t>6/8/2026</a:t>
+              <a:t>6/30/2026</a:t>
             </a:fld>
             <a:endParaRPr lang="en-US" dirty="0"/>
           </a:p>
@@ -1495,7 +1495,7 @@
           <a:p>
             <a:fld id="{2021EB0C-0560-453E-ACFF-9C455F55CF40}" type="datetimeFigureOut">
               <a:rPr lang="en-US" smtClean="0"/>
-              <a:t>6/8/2026</a:t>
+              <a:t>6/30/2026</a:t>
             </a:fld>
             <a:endParaRPr lang="en-US" dirty="0"/>
           </a:p>
@@ -1693,7 +1693,7 @@
           <a:p>
             <a:fld id="{2021EB0C-0560-453E-ACFF-9C455F55CF40}" type="datetimeFigureOut">
               <a:rPr lang="en-US" smtClean="0"/>
-              <a:t>6/8/2026</a:t>
+              <a:t>6/30/2026</a:t>
             </a:fld>
             <a:endParaRPr lang="en-US" dirty="0"/>
           </a:p>
@@ -1901,7 +1901,7 @@
           <a:p>
             <a:fld id="{2021EB0C-0560-453E-ACFF-9C455F55CF40}" type="datetimeFigureOut">
               <a:rPr lang="en-US" smtClean="0"/>
-              <a:t>6/8/2026</a:t>
+              <a:t>6/30/2026</a:t>
             </a:fld>
             <a:endParaRPr lang="en-US" dirty="0"/>
           </a:p>
@@ -2099,7 +2099,7 @@
           <a:p>
             <a:fld id="{2021EB0C-0560-453E-ACFF-9C455F55CF40}" type="datetimeFigureOut">
               <a:rPr lang="en-US" smtClean="0"/>
-              <a:t>6/8/2026</a:t>
+              <a:t>6/30/2026</a:t>
             </a:fld>
             <a:endParaRPr lang="en-US" dirty="0"/>
           </a:p>
@@ -2374,7 +2374,7 @@
           <a:p>
             <a:fld id="{2021EB0C-0560-453E-ACFF-9C455F55CF40}" type="datetimeFigureOut">
               <a:rPr lang="en-US" smtClean="0"/>
-              <a:t>6/8/2026</a:t>
+              <a:t>6/30/2026</a:t>
             </a:fld>
             <a:endParaRPr lang="en-US" dirty="0"/>
           </a:p>
@@ -2639,7 +2639,7 @@
           <a:p>
             <a:fld id="{2021EB0C-0560-453E-ACFF-9C455F55CF40}" type="datetimeFigureOut">
               <a:rPr lang="en-US" smtClean="0"/>
-              <a:t>6/8/2026</a:t>
+              <a:t>6/30/2026</a:t>
             </a:fld>
             <a:endParaRPr lang="en-US" dirty="0"/>
           </a:p>
@@ -3051,7 +3051,7 @@
           <a:p>
             <a:fld id="{2021EB0C-0560-453E-ACFF-9C455F55CF40}" type="datetimeFigureOut">
               <a:rPr lang="en-US" smtClean="0"/>
-              <a:t>6/8/2026</a:t>
+              <a:t>6/30/2026</a:t>
             </a:fld>
             <a:endParaRPr lang="en-US" dirty="0"/>
           </a:p>
@@ -3192,7 +3192,7 @@
           <a:p>
             <a:fld id="{2021EB0C-0560-453E-ACFF-9C455F55CF40}" type="datetimeFigureOut">
               <a:rPr lang="en-US" smtClean="0"/>
-              <a:t>6/8/2026</a:t>
+              <a:t>6/30/2026</a:t>
             </a:fld>
             <a:endParaRPr lang="en-US" dirty="0"/>
           </a:p>
@@ -3305,7 +3305,7 @@
           <a:p>
             <a:fld id="{2021EB0C-0560-453E-ACFF-9C455F55CF40}" type="datetimeFigureOut">
               <a:rPr lang="en-US" smtClean="0"/>
-              <a:t>6/8/2026</a:t>
+              <a:t>6/30/2026</a:t>
             </a:fld>
             <a:endParaRPr lang="en-US" dirty="0"/>
           </a:p>
@@ -3616,7 +3616,7 @@
           <a:p>
             <a:fld id="{2021EB0C-0560-453E-ACFF-9C455F55CF40}" type="datetimeFigureOut">
               <a:rPr lang="en-US" smtClean="0"/>
-              <a:t>6/8/2026</a:t>
+              <a:t>6/30/2026</a:t>
             </a:fld>
             <a:endParaRPr lang="en-US" dirty="0"/>
           </a:p>
@@ -3904,7 +3904,7 @@
           <a:p>
             <a:fld id="{2021EB0C-0560-453E-ACFF-9C455F55CF40}" type="datetimeFigureOut">
               <a:rPr lang="en-US" smtClean="0"/>
-              <a:t>6/8/2026</a:t>
+              <a:t>6/30/2026</a:t>
             </a:fld>
             <a:endParaRPr lang="en-US" dirty="0"/>
           </a:p>
@@ -4145,7 +4145,7 @@
           <a:p>
             <a:fld id="{2021EB0C-0560-453E-ACFF-9C455F55CF40}" type="datetimeFigureOut">
               <a:rPr lang="en-US" smtClean="0"/>
-              <a:t>6/8/2026</a:t>
+              <a:t>6/30/2026</a:t>
             </a:fld>
             <a:endParaRPr lang="en-US" dirty="0"/>
           </a:p>
@@ -9808,8 +9808,8 @@
         </p:nvSpPr>
         <p:spPr bwMode="auto">
           <a:xfrm rot="10800000" flipV="1">
-            <a:off x="530578" y="1395934"/>
-            <a:ext cx="11218406" cy="4653646"/>
+            <a:off x="530578" y="1831728"/>
+            <a:ext cx="11218406" cy="3782061"/>
           </a:xfrm>
           <a:prstGeom prst="rect">
             <a:avLst/>
@@ -9857,240 +9857,217 @@
           </a:bodyPr>
           <a:lstStyle/>
           <a:p>
-            <a:pPr marL="342900" lvl="0" indent="-342900" algn="just" eaLnBrk="0" fontAlgn="base" hangingPunct="0">
+            <a:pPr marL="0" marR="0">
               <a:lnSpc>
                 <a:spcPct val="150000"/>
               </a:lnSpc>
-              <a:spcBef>
-                <a:spcPct val="0"/>
-              </a:spcBef>
-              <a:spcAft>
-                <a:spcPct val="0"/>
-              </a:spcAft>
-              <a:buFont typeface="Arial" panose="020B0604020202020204" pitchFamily="34" charset="0"/>
-              <a:buChar char="•"/>
             </a:pPr>
             <a:r>
-              <a:rPr lang="en-US" sz="2000" dirty="0">
-                <a:latin typeface="Times New Roman" panose="02020603050405020304" pitchFamily="18" charset="0"/>
-                <a:cs typeface="Times New Roman" panose="02020603050405020304" pitchFamily="18" charset="0"/>
-              </a:rPr>
-              <a:t>Existing CNN-based methods fail to preserve spatial relationships, leading to reduced diagnostic precision, as noted by </a:t>
-            </a:r>
-            <a:r>
-              <a:rPr lang="en-US" sz="2000" b="1" dirty="0">
-                <a:latin typeface="Times New Roman" panose="02020603050405020304" pitchFamily="18" charset="0"/>
-                <a:cs typeface="Times New Roman" panose="02020603050405020304" pitchFamily="18" charset="0"/>
-              </a:rPr>
-              <a:t>Scherer et al. (2010)</a:t>
-            </a:r>
-            <a:r>
-              <a:rPr lang="en-US" sz="2000" dirty="0">
-                <a:latin typeface="Times New Roman" panose="02020603050405020304" pitchFamily="18" charset="0"/>
-                <a:cs typeface="Times New Roman" panose="02020603050405020304" pitchFamily="18" charset="0"/>
-              </a:rPr>
-              <a:t> and </a:t>
-            </a:r>
-            <a:r>
-              <a:rPr lang="en-US" sz="2000" b="1" dirty="0">
-                <a:latin typeface="Times New Roman" panose="02020603050405020304" pitchFamily="18" charset="0"/>
-                <a:cs typeface="Times New Roman" panose="02020603050405020304" pitchFamily="18" charset="0"/>
-              </a:rPr>
-              <a:t>Shin et al. (2016)</a:t>
-            </a:r>
-            <a:r>
-              <a:rPr lang="en-US" sz="2000" dirty="0">
-                <a:latin typeface="Times New Roman" panose="02020603050405020304" pitchFamily="18" charset="0"/>
-                <a:cs typeface="Times New Roman" panose="02020603050405020304" pitchFamily="18" charset="0"/>
-              </a:rPr>
-              <a:t> [5][7].</a:t>
-            </a:r>
-            <a:endParaRPr kumimoji="0" lang="en-US" altLang="en-US" sz="2000" b="0" i="0" u="none" strike="noStrike" cap="none" normalizeH="0" baseline="0" dirty="0">
-              <a:ln>
-                <a:noFill/>
-              </a:ln>
-              <a:solidFill>
-                <a:schemeClr val="tx1"/>
-              </a:solidFill>
-              <a:effectLst/>
-              <a:latin typeface="Times New Roman" panose="02020603050405020304" pitchFamily="18" charset="0"/>
-              <a:cs typeface="Times New Roman" panose="02020603050405020304" pitchFamily="18" charset="0"/>
-            </a:endParaRPr>
-          </a:p>
-          <a:p>
-            <a:pPr marL="342900" lvl="0" indent="-342900" algn="just" eaLnBrk="0" fontAlgn="base" hangingPunct="0">
+              <a:rPr lang="en-US" sz="1800" dirty="0">
+                <a:effectLst/>
+                <a:latin typeface="Times New Roman" panose="02020603050405020304" pitchFamily="18" charset="0"/>
+                <a:ea typeface="Times New Roman" panose="02020603050405020304" pitchFamily="18" charset="0"/>
+              </a:rPr>
+              <a:t>Based on the introduction and the reviewed literature, the following research gaps are identified:</a:t>
+            </a:r>
+          </a:p>
+          <a:p>
+            <a:pPr marL="342900" indent="-342900">
               <a:lnSpc>
                 <a:spcPct val="150000"/>
               </a:lnSpc>
-              <a:spcBef>
-                <a:spcPct val="0"/>
-              </a:spcBef>
-              <a:spcAft>
-                <a:spcPct val="0"/>
-              </a:spcAft>
-              <a:buFont typeface="Arial" panose="020B0604020202020204" pitchFamily="34" charset="0"/>
-              <a:buChar char="•"/>
+              <a:buFont typeface="Wingdings" panose="05000000000000000000" pitchFamily="2" charset="2"/>
+              <a:buChar char=""/>
+              <a:tabLst>
+                <a:tab pos="800100" algn="l"/>
+              </a:tabLst>
             </a:pPr>
             <a:r>
-              <a:rPr lang="en-US" sz="2000" dirty="0">
+              <a:rPr lang="en-US" sz="1800" dirty="0">
+                <a:effectLst/>
+                <a:latin typeface="Times New Roman" panose="02020603050405020304" pitchFamily="18" charset="0"/>
+                <a:ea typeface="Times New Roman" panose="02020603050405020304" pitchFamily="18" charset="0"/>
+              </a:rPr>
+              <a:t>There is a lack of comprehensive comparative studies between CNN and </a:t>
+            </a:r>
+            <a:r>
+              <a:rPr lang="en-US" sz="1800" dirty="0" err="1">
+                <a:effectLst/>
+                <a:latin typeface="Times New Roman" panose="02020603050405020304" pitchFamily="18" charset="0"/>
+                <a:ea typeface="Times New Roman" panose="02020603050405020304" pitchFamily="18" charset="0"/>
+              </a:rPr>
+              <a:t>CapsNet</a:t>
+            </a:r>
+            <a:r>
+              <a:rPr lang="en-US" sz="1800" dirty="0">
+                <a:effectLst/>
+                <a:latin typeface="Times New Roman" panose="02020603050405020304" pitchFamily="18" charset="0"/>
+                <a:ea typeface="Times New Roman" panose="02020603050405020304" pitchFamily="18" charset="0"/>
+              </a:rPr>
+              <a:t> models for lung nodule detection on standardized CT datasets </a:t>
+            </a:r>
+            <a:r>
+              <a:rPr lang="en-US" dirty="0">
                 <a:latin typeface="Times New Roman" panose="02020603050405020304" pitchFamily="18" charset="0"/>
                 <a:cs typeface="Times New Roman" panose="02020603050405020304" pitchFamily="18" charset="0"/>
               </a:rPr>
-              <a:t>CNN-based models achieve 85%–96.9% accuracy in lung nodule classification, yet their pooling layers discard spatial information critical for precise nodule characterization, and they still produce false-positive rates of approximately 1 per scan (</a:t>
-            </a:r>
-            <a:r>
-              <a:rPr lang="en-US" sz="2000" b="1" dirty="0">
-                <a:latin typeface="Times New Roman" panose="02020603050405020304" pitchFamily="18" charset="0"/>
-                <a:cs typeface="Times New Roman" panose="02020603050405020304" pitchFamily="18" charset="0"/>
-              </a:rPr>
-              <a:t>Ma et al., 2024; Hendrix et al., 2023; Scherer et al., 2010</a:t>
-            </a:r>
-            <a:r>
-              <a:rPr lang="en-US" sz="2000" dirty="0">
-                <a:latin typeface="Times New Roman" panose="02020603050405020304" pitchFamily="18" charset="0"/>
-                <a:cs typeface="Times New Roman" panose="02020603050405020304" pitchFamily="18" charset="0"/>
-              </a:rPr>
-              <a:t>).</a:t>
-            </a:r>
-          </a:p>
-          <a:p>
-            <a:pPr marL="342900" lvl="0" indent="-342900" algn="just" eaLnBrk="0" fontAlgn="base" hangingPunct="0">
+              <a:t>(Hendrix et al., 2024).</a:t>
+            </a:r>
+            <a:endParaRPr lang="en-US" sz="1800" dirty="0">
+              <a:effectLst/>
+              <a:latin typeface="Times New Roman" panose="02020603050405020304" pitchFamily="18" charset="0"/>
+              <a:ea typeface="Times New Roman" panose="02020603050405020304" pitchFamily="18" charset="0"/>
+            </a:endParaRPr>
+          </a:p>
+          <a:p>
+            <a:pPr marL="342900" indent="-342900">
               <a:lnSpc>
                 <a:spcPct val="150000"/>
               </a:lnSpc>
-              <a:spcBef>
-                <a:spcPct val="0"/>
-              </a:spcBef>
-              <a:spcAft>
-                <a:spcPct val="0"/>
-              </a:spcAft>
-              <a:buFont typeface="Arial" panose="020B0604020202020204" pitchFamily="34" charset="0"/>
-              <a:buChar char="•"/>
+              <a:buFont typeface="Wingdings" panose="05000000000000000000" pitchFamily="2" charset="2"/>
+              <a:buChar char=""/>
+              <a:tabLst>
+                <a:tab pos="800100" algn="l"/>
+              </a:tabLst>
             </a:pPr>
             <a:r>
-              <a:rPr lang="en-US" sz="2000" dirty="0">
+              <a:rPr lang="en-US" sz="1800" dirty="0">
+                <a:effectLst/>
+                <a:latin typeface="Times New Roman" panose="02020603050405020304" pitchFamily="18" charset="0"/>
+                <a:ea typeface="Times New Roman" panose="02020603050405020304" pitchFamily="18" charset="0"/>
+              </a:rPr>
+              <a:t>The spatial-awareness benefits of </a:t>
+            </a:r>
+            <a:r>
+              <a:rPr lang="en-US" sz="1800" dirty="0" err="1">
+                <a:effectLst/>
+                <a:latin typeface="Times New Roman" panose="02020603050405020304" pitchFamily="18" charset="0"/>
+                <a:ea typeface="Times New Roman" panose="02020603050405020304" pitchFamily="18" charset="0"/>
+              </a:rPr>
+              <a:t>CapsNets</a:t>
+            </a:r>
+            <a:r>
+              <a:rPr lang="en-US" sz="1800" dirty="0">
+                <a:effectLst/>
+                <a:latin typeface="Times New Roman" panose="02020603050405020304" pitchFamily="18" charset="0"/>
+                <a:ea typeface="Times New Roman" panose="02020603050405020304" pitchFamily="18" charset="0"/>
+              </a:rPr>
+              <a:t>, achieved through dynamic routing, remain empirically unvalidated in medical imaging where part–whole anatomical relationships are critical </a:t>
+            </a:r>
+            <a:r>
+              <a:rPr lang="en-US" dirty="0">
                 <a:latin typeface="Times New Roman" panose="02020603050405020304" pitchFamily="18" charset="0"/>
                 <a:cs typeface="Times New Roman" panose="02020603050405020304" pitchFamily="18" charset="0"/>
               </a:rPr>
-              <a:t>Existing deep learning models show poor generalization across different hospital imaging equipment and limited training datasets, reducing clinical reliability (</a:t>
-            </a:r>
-            <a:r>
-              <a:rPr lang="en-US" sz="2000" b="1" dirty="0">
-                <a:latin typeface="Times New Roman" panose="02020603050405020304" pitchFamily="18" charset="0"/>
-                <a:cs typeface="Times New Roman" panose="02020603050405020304" pitchFamily="18" charset="0"/>
-              </a:rPr>
-              <a:t>Shin et al., 2016; </a:t>
-            </a:r>
-            <a:r>
-              <a:rPr lang="en-US" sz="2000" b="1" dirty="0" err="1">
-                <a:latin typeface="Times New Roman" panose="02020603050405020304" pitchFamily="18" charset="0"/>
-                <a:cs typeface="Times New Roman" panose="02020603050405020304" pitchFamily="18" charset="0"/>
-              </a:rPr>
-              <a:t>Setio</a:t>
-            </a:r>
-            <a:r>
-              <a:rPr lang="en-US" sz="2000" b="1" dirty="0">
-                <a:latin typeface="Times New Roman" panose="02020603050405020304" pitchFamily="18" charset="0"/>
-                <a:cs typeface="Times New Roman" panose="02020603050405020304" pitchFamily="18" charset="0"/>
-              </a:rPr>
-              <a:t> et al., 2016</a:t>
-            </a:r>
-            <a:r>
-              <a:rPr lang="en-US" sz="2000" dirty="0">
-                <a:latin typeface="Times New Roman" panose="02020603050405020304" pitchFamily="18" charset="0"/>
-                <a:cs typeface="Times New Roman" panose="02020603050405020304" pitchFamily="18" charset="0"/>
-              </a:rPr>
-              <a:t>).</a:t>
-            </a:r>
-          </a:p>
-          <a:p>
-            <a:pPr marL="342900" lvl="0" indent="-342900" algn="just" eaLnBrk="0" fontAlgn="base" hangingPunct="0">
+              <a:t>(Ma et al., 2024).</a:t>
+            </a:r>
+            <a:endParaRPr lang="en-US" sz="1800" dirty="0">
+              <a:effectLst/>
+              <a:latin typeface="Times New Roman" panose="02020603050405020304" pitchFamily="18" charset="0"/>
+              <a:ea typeface="Times New Roman" panose="02020603050405020304" pitchFamily="18" charset="0"/>
+            </a:endParaRPr>
+          </a:p>
+          <a:p>
+            <a:pPr marL="342900" indent="-342900">
               <a:lnSpc>
                 <a:spcPct val="150000"/>
               </a:lnSpc>
-              <a:spcBef>
-                <a:spcPct val="0"/>
-              </a:spcBef>
-              <a:spcAft>
-                <a:spcPct val="0"/>
-              </a:spcAft>
-              <a:buFont typeface="Arial" panose="020B0604020202020204" pitchFamily="34" charset="0"/>
-              <a:buChar char="•"/>
+              <a:buFont typeface="Wingdings" panose="05000000000000000000" pitchFamily="2" charset="2"/>
+              <a:buChar char=""/>
+              <a:tabLst>
+                <a:tab pos="800100" algn="l"/>
+              </a:tabLst>
             </a:pPr>
             <a:r>
-              <a:rPr lang="en-US" sz="2000" dirty="0">
+              <a:rPr lang="en-US" sz="1800" dirty="0">
+                <a:effectLst/>
+                <a:latin typeface="Times New Roman" panose="02020603050405020304" pitchFamily="18" charset="0"/>
+                <a:ea typeface="Times New Roman" panose="02020603050405020304" pitchFamily="18" charset="0"/>
+              </a:rPr>
+              <a:t>CNN-based detectors continue to suffer from high false-positive rates and information loss from pooling operations, which </a:t>
+            </a:r>
+            <a:r>
+              <a:rPr lang="en-US" sz="1800" dirty="0" err="1">
+                <a:effectLst/>
+                <a:latin typeface="Times New Roman" panose="02020603050405020304" pitchFamily="18" charset="0"/>
+                <a:ea typeface="Times New Roman" panose="02020603050405020304" pitchFamily="18" charset="0"/>
+              </a:rPr>
+              <a:t>CapsNet</a:t>
+            </a:r>
+            <a:r>
+              <a:rPr lang="en-US" sz="1800" dirty="0">
+                <a:effectLst/>
+                <a:latin typeface="Times New Roman" panose="02020603050405020304" pitchFamily="18" charset="0"/>
+                <a:ea typeface="Times New Roman" panose="02020603050405020304" pitchFamily="18" charset="0"/>
+              </a:rPr>
+              <a:t> architectures may mitigate but have not been systematically tested against </a:t>
+            </a:r>
+            <a:r>
+              <a:rPr lang="en-US" dirty="0">
                 <a:latin typeface="Times New Roman" panose="02020603050405020304" pitchFamily="18" charset="0"/>
                 <a:cs typeface="Times New Roman" panose="02020603050405020304" pitchFamily="18" charset="0"/>
               </a:rPr>
-              <a:t>Capsule Neural Networks preserve spatial hierarchies through dynamic routing (</a:t>
-            </a:r>
-            <a:r>
-              <a:rPr lang="en-US" sz="2000" b="1" dirty="0" err="1">
+              <a:t>(Kumar et al., 2015)</a:t>
+            </a:r>
+            <a:r>
+              <a:rPr lang="en-US" sz="1800" dirty="0">
+                <a:effectLst/>
+                <a:latin typeface="Times New Roman" panose="02020603050405020304" pitchFamily="18" charset="0"/>
+                <a:ea typeface="Times New Roman" panose="02020603050405020304" pitchFamily="18" charset="0"/>
+              </a:rPr>
+              <a:t>.</a:t>
+            </a:r>
+          </a:p>
+          <a:p>
+            <a:pPr marL="342900" marR="0" lvl="0" indent="-342900">
+              <a:lnSpc>
+                <a:spcPct val="150000"/>
+              </a:lnSpc>
+              <a:buFont typeface="Wingdings" panose="05000000000000000000" pitchFamily="2" charset="2"/>
+              <a:buChar char=""/>
+              <a:tabLst>
+                <a:tab pos="800100" algn="l"/>
+              </a:tabLst>
+            </a:pPr>
+            <a:r>
+              <a:rPr lang="en-US" sz="1800" dirty="0">
+                <a:effectLst/>
+                <a:latin typeface="Times New Roman" panose="02020603050405020304" pitchFamily="18" charset="0"/>
+                <a:ea typeface="Times New Roman" panose="02020603050405020304" pitchFamily="18" charset="0"/>
+              </a:rPr>
+              <a:t>There is limited research on the computational efficiency and real-world deployment feasibility of </a:t>
+            </a:r>
+            <a:r>
+              <a:rPr lang="en-US" sz="1800" dirty="0" err="1">
+                <a:effectLst/>
+                <a:latin typeface="Times New Roman" panose="02020603050405020304" pitchFamily="18" charset="0"/>
+                <a:ea typeface="Times New Roman" panose="02020603050405020304" pitchFamily="18" charset="0"/>
+              </a:rPr>
+              <a:t>CapsNet</a:t>
+            </a:r>
+            <a:r>
+              <a:rPr lang="en-US" sz="1800" dirty="0">
+                <a:effectLst/>
+                <a:latin typeface="Times New Roman" panose="02020603050405020304" pitchFamily="18" charset="0"/>
+                <a:ea typeface="Times New Roman" panose="02020603050405020304" pitchFamily="18" charset="0"/>
+              </a:rPr>
+              <a:t>-based diagnostic systems in clinical screening environments </a:t>
+            </a:r>
+            <a:r>
+              <a:rPr lang="en-US" dirty="0">
                 <a:latin typeface="Times New Roman" panose="02020603050405020304" pitchFamily="18" charset="0"/>
                 <a:cs typeface="Times New Roman" panose="02020603050405020304" pitchFamily="18" charset="0"/>
               </a:rPr>
-              <a:t>Sabour</a:t>
-            </a:r>
-            <a:r>
-              <a:rPr lang="en-US" sz="2000" b="1" dirty="0">
-                <a:latin typeface="Times New Roman" panose="02020603050405020304" pitchFamily="18" charset="0"/>
-                <a:cs typeface="Times New Roman" panose="02020603050405020304" pitchFamily="18" charset="0"/>
-              </a:rPr>
-              <a:t> et al., 2017</a:t>
-            </a:r>
-            <a:r>
-              <a:rPr lang="en-US" sz="2000" dirty="0">
-                <a:latin typeface="Times New Roman" panose="02020603050405020304" pitchFamily="18" charset="0"/>
-                <a:cs typeface="Times New Roman" panose="02020603050405020304" pitchFamily="18" charset="0"/>
-              </a:rPr>
-              <a:t>), yet no study has applied or compared </a:t>
-            </a:r>
-            <a:r>
-              <a:rPr lang="en-US" sz="2000" dirty="0" err="1">
-                <a:latin typeface="Times New Roman" panose="02020603050405020304" pitchFamily="18" charset="0"/>
-                <a:cs typeface="Times New Roman" panose="02020603050405020304" pitchFamily="18" charset="0"/>
-              </a:rPr>
-              <a:t>CapsNets</a:t>
-            </a:r>
-            <a:r>
-              <a:rPr lang="en-US" sz="2000" dirty="0">
-                <a:latin typeface="Times New Roman" panose="02020603050405020304" pitchFamily="18" charset="0"/>
-                <a:cs typeface="Times New Roman" panose="02020603050405020304" pitchFamily="18" charset="0"/>
-              </a:rPr>
-              <a:t> against CNNs specifically for lung nodule detection (</a:t>
-            </a:r>
-            <a:r>
-              <a:rPr lang="en-US" sz="2000" b="1" dirty="0" err="1">
-                <a:latin typeface="Times New Roman" panose="02020603050405020304" pitchFamily="18" charset="0"/>
-                <a:cs typeface="Times New Roman" panose="02020603050405020304" pitchFamily="18" charset="0"/>
-              </a:rPr>
-              <a:t>Xue</a:t>
-            </a:r>
-            <a:r>
-              <a:rPr lang="en-US" sz="2000" b="1" dirty="0">
-                <a:latin typeface="Times New Roman" panose="02020603050405020304" pitchFamily="18" charset="0"/>
-                <a:cs typeface="Times New Roman" panose="02020603050405020304" pitchFamily="18" charset="0"/>
-              </a:rPr>
-              <a:t> et al., 2025</a:t>
-            </a:r>
-            <a:r>
-              <a:rPr lang="en-US" sz="2000" dirty="0">
-                <a:latin typeface="Times New Roman" panose="02020603050405020304" pitchFamily="18" charset="0"/>
-                <a:cs typeface="Times New Roman" panose="02020603050405020304" pitchFamily="18" charset="0"/>
-              </a:rPr>
-              <a:t>).</a:t>
-            </a:r>
-            <a:endParaRPr kumimoji="0" lang="en-US" altLang="en-US" sz="2000" b="0" i="0" u="none" strike="noStrike" cap="none" normalizeH="0" baseline="0" dirty="0">
-              <a:ln>
-                <a:noFill/>
-              </a:ln>
-              <a:solidFill>
-                <a:schemeClr val="tx1"/>
-              </a:solidFill>
-              <a:effectLst/>
-              <a:latin typeface="Times New Roman" panose="02020603050405020304" pitchFamily="18" charset="0"/>
-              <a:cs typeface="Times New Roman" panose="02020603050405020304" pitchFamily="18" charset="0"/>
-            </a:endParaRPr>
+              <a:t>(Fawcett, 2006)</a:t>
+            </a:r>
+            <a:r>
+              <a:rPr lang="en-US" sz="1800" dirty="0">
+                <a:effectLst/>
+                <a:latin typeface="Times New Roman" panose="02020603050405020304" pitchFamily="18" charset="0"/>
+                <a:ea typeface="Times New Roman" panose="02020603050405020304" pitchFamily="18" charset="0"/>
+              </a:rPr>
+              <a:t>.</a:t>
+            </a:r>
           </a:p>
         </p:txBody>
       </p:sp>
@@ -10194,10 +10171,11 @@
           </a:bodyPr>
           <a:lstStyle/>
           <a:p>
-            <a:pPr marL="0" marR="0">
+            <a:pPr marL="0" marR="0" indent="0">
               <a:lnSpc>
                 <a:spcPct val="150000"/>
               </a:lnSpc>
+              <a:buNone/>
             </a:pPr>
             <a:r>
               <a:rPr lang="en-US" sz="1800" dirty="0">
@@ -10319,7 +10297,7 @@
                 <a:ea typeface="Arial" pitchFamily="34" charset="-122"/>
                 <a:cs typeface="Times New Roman" panose="02020603050405020304" pitchFamily="18" charset="0"/>
               </a:rPr>
-              <a:t>Dataset: LIDC-IDRI</a:t>
+              <a:t>Dataset: Lung Image Database Consortium-Image Database Resource Initiative</a:t>
             </a:r>
             <a:endParaRPr lang="en-US" sz="2400" dirty="0">
               <a:latin typeface="Times New Roman" panose="02020603050405020304" pitchFamily="18" charset="0"/>
